--- a/_bench/dist/atlas-vol-iii.pptx
+++ b/_bench/dist/atlas-vol-iii.pptx
@@ -14663,7 +14663,49 @@
       </p:sp>
       <p:sp>
         <p:nvSpPr>
-          <p:cNvPr id="166" name="TextBox 165"/>
+          <p:cNvPr id="166" name="Rectangle 165"/>
+          <p:cNvSpPr/>
+          <p:nvPr/>
+        </p:nvSpPr>
+        <p:spPr>
+          <a:xfrm>
+            <a:off x="895350" y="5476875"/>
+            <a:ext cx="457200" cy="9525"/>
+          </a:xfrm>
+          <a:prstGeom prst="rect">
+            <a:avLst/>
+          </a:prstGeom>
+          <a:noFill/>
+          <a:ln>
+            <a:noFill/>
+          </a:ln>
+        </p:spPr>
+        <p:style>
+          <a:lnRef idx="1">
+            <a:schemeClr val="accent1"/>
+          </a:lnRef>
+          <a:fillRef idx="3">
+            <a:schemeClr val="accent1"/>
+          </a:fillRef>
+          <a:effectRef idx="2">
+            <a:schemeClr val="accent1"/>
+          </a:effectRef>
+          <a:fontRef idx="minor">
+            <a:schemeClr val="lt1"/>
+          </a:fontRef>
+        </p:style>
+        <p:txBody>
+          <a:bodyPr rtlCol="0" anchor="ctr"/>
+          <a:lstStyle/>
+          <a:p>
+            <a:pPr algn="ctr"/>
+            <a:endParaRPr lang="en-US"/>
+          </a:p>
+        </p:txBody>
+      </p:sp>
+      <p:sp>
+        <p:nvSpPr>
+          <p:cNvPr id="167" name="TextBox 166"/>
           <p:cNvSpPr txBox="1"/>
           <p:nvPr/>
         </p:nvSpPr>
@@ -14698,7 +14740,7 @@
       </p:sp>
       <p:sp>
         <p:nvSpPr>
-          <p:cNvPr id="167" name="TextBox 166"/>
+          <p:cNvPr id="168" name="TextBox 167"/>
           <p:cNvSpPr txBox="1"/>
           <p:nvPr/>
         </p:nvSpPr>
@@ -14733,7 +14775,7 @@
       </p:sp>
       <p:sp>
         <p:nvSpPr>
-          <p:cNvPr id="168" name="TextBox 167"/>
+          <p:cNvPr id="169" name="TextBox 168"/>
           <p:cNvSpPr txBox="1"/>
           <p:nvPr/>
         </p:nvSpPr>
@@ -14768,7 +14810,7 @@
       </p:sp>
       <p:sp>
         <p:nvSpPr>
-          <p:cNvPr id="169" name="TextBox 168"/>
+          <p:cNvPr id="170" name="TextBox 169"/>
           <p:cNvSpPr txBox="1"/>
           <p:nvPr/>
         </p:nvSpPr>
@@ -25672,7 +25714,49 @@
       </p:sp>
       <p:sp>
         <p:nvSpPr>
-          <p:cNvPr id="208" name="TextBox 207"/>
+          <p:cNvPr id="208" name="Rectangle 207"/>
+          <p:cNvSpPr/>
+          <p:nvPr/>
+        </p:nvSpPr>
+        <p:spPr>
+          <a:xfrm>
+            <a:off x="895350" y="5476875"/>
+            <a:ext cx="457200" cy="9525"/>
+          </a:xfrm>
+          <a:prstGeom prst="rect">
+            <a:avLst/>
+          </a:prstGeom>
+          <a:noFill/>
+          <a:ln>
+            <a:noFill/>
+          </a:ln>
+        </p:spPr>
+        <p:style>
+          <a:lnRef idx="1">
+            <a:schemeClr val="accent1"/>
+          </a:lnRef>
+          <a:fillRef idx="3">
+            <a:schemeClr val="accent1"/>
+          </a:fillRef>
+          <a:effectRef idx="2">
+            <a:schemeClr val="accent1"/>
+          </a:effectRef>
+          <a:fontRef idx="minor">
+            <a:schemeClr val="lt1"/>
+          </a:fontRef>
+        </p:style>
+        <p:txBody>
+          <a:bodyPr rtlCol="0" anchor="ctr"/>
+          <a:lstStyle/>
+          <a:p>
+            <a:pPr algn="ctr"/>
+            <a:endParaRPr lang="en-US"/>
+          </a:p>
+        </p:txBody>
+      </p:sp>
+      <p:sp>
+        <p:nvSpPr>
+          <p:cNvPr id="209" name="TextBox 208"/>
           <p:cNvSpPr txBox="1"/>
           <p:nvPr/>
         </p:nvSpPr>
@@ -25707,7 +25791,7 @@
       </p:sp>
       <p:sp>
         <p:nvSpPr>
-          <p:cNvPr id="209" name="TextBox 208"/>
+          <p:cNvPr id="210" name="TextBox 209"/>
           <p:cNvSpPr txBox="1"/>
           <p:nvPr/>
         </p:nvSpPr>
@@ -25742,7 +25826,7 @@
       </p:sp>
       <p:sp>
         <p:nvSpPr>
-          <p:cNvPr id="210" name="TextBox 209"/>
+          <p:cNvPr id="211" name="TextBox 210"/>
           <p:cNvSpPr txBox="1"/>
           <p:nvPr/>
         </p:nvSpPr>
@@ -25777,7 +25861,7 @@
       </p:sp>
       <p:sp>
         <p:nvSpPr>
-          <p:cNvPr id="211" name="TextBox 210"/>
+          <p:cNvPr id="212" name="TextBox 211"/>
           <p:cNvSpPr txBox="1"/>
           <p:nvPr/>
         </p:nvSpPr>

--- a/_bench/dist/atlas-vol-iii.pptx
+++ b/_bench/dist/atlas-vol-iii.pptx
@@ -3322,7 +3322,7 @@
                 <a:solidFill>
                   <a:srgbClr val="1F2924"/>
                 </a:solidFill>
-                <a:latin typeface="Spectral"/>
+                <a:latin typeface="Cambria"/>
               </a:rPr>
               <a:t>On editing</a:t>
             </a:r>
@@ -3786,7 +3786,7 @@
                 <a:solidFill>
                   <a:srgbClr val="2D3833"/>
                 </a:solidFill>
-                <a:latin typeface="Spectral"/>
+                <a:latin typeface="Cambria"/>
               </a:rPr>
               <a:t xml:space="preserve">The conversion drift across one thousand
           two hundred eighty-four decks.</a:t>
@@ -4089,7 +4089,7 @@
                 <a:solidFill>
                   <a:srgbClr val="1F2924"/>
                 </a:solidFill>
-                <a:latin typeface="Spectral"/>
+                <a:latin typeface="Cambria"/>
               </a:rPr>
               <a:t>The volume in six figures.</a:t>
             </a:r>
@@ -5385,7 +5385,7 @@
                 <a:solidFill>
                   <a:srgbClr val="B05A3C"/>
                 </a:solidFill>
-                <a:latin typeface="Spectral"/>
+                <a:latin typeface="Cambria"/>
               </a:rPr>
               <a:t>—</a:t>
             </a:r>
@@ -5420,7 +5420,7 @@
                 <a:solidFill>
                   <a:srgbClr val="2D3833"/>
                 </a:solidFill>
-                <a:latin typeface="Spectral"/>
+                <a:latin typeface="Cambria"/>
               </a:rPr>
               <a:t xml:space="preserve">
           The last cut is the page that</a:t>
@@ -5433,7 +5433,7 @@
                 <a:solidFill>
                   <a:srgbClr val="2D3833"/>
                 </a:solidFill>
-                <a:latin typeface="Spectral"/>
+                <a:latin typeface="Cambria"/>
               </a:rPr>
               <a:t xml:space="preserve">says only what it must.
         </a:t>
@@ -5911,7 +5911,7 @@
                 <a:solidFill>
                   <a:srgbClr val="B05A3C"/>
                 </a:solidFill>
-                <a:latin typeface="Inter Tight"/>
+                <a:latin typeface="Calibri"/>
               </a:rPr>
               <a:t>Index — six chapters</a:t>
             </a:r>
@@ -6023,7 +6023,7 @@
                 <a:solidFill>
                   <a:srgbClr val="1F2924"/>
                 </a:solidFill>
-                <a:latin typeface="Spectral"/>
+                <a:latin typeface="Cambria"/>
               </a:rPr>
               <a:t>Removing</a:t>
             </a:r>
@@ -6135,7 +6135,7 @@
                 <a:solidFill>
                   <a:srgbClr val="1F2924"/>
                 </a:solidFill>
-                <a:latin typeface="Spectral"/>
+                <a:latin typeface="Cambria"/>
               </a:rPr>
               <a:t>Subtraction</a:t>
             </a:r>
@@ -6247,7 +6247,7 @@
                 <a:solidFill>
                   <a:srgbClr val="1F2924"/>
                 </a:solidFill>
-                <a:latin typeface="Spectral"/>
+                <a:latin typeface="Cambria"/>
               </a:rPr>
               <a:t>Restraint</a:t>
             </a:r>
@@ -6359,7 +6359,7 @@
                 <a:solidFill>
                   <a:srgbClr val="1F2924"/>
                 </a:solidFill>
-                <a:latin typeface="Spectral"/>
+                <a:latin typeface="Cambria"/>
               </a:rPr>
               <a:t>The discipline</a:t>
             </a:r>
@@ -6471,7 +6471,7 @@
                 <a:solidFill>
                   <a:srgbClr val="1F2924"/>
                 </a:solidFill>
-                <a:latin typeface="Spectral"/>
+                <a:latin typeface="Cambria"/>
               </a:rPr>
               <a:t>Asymmetry</a:t>
             </a:r>
@@ -6583,7 +6583,7 @@
                 <a:solidFill>
                   <a:srgbClr val="1F2924"/>
                 </a:solidFill>
-                <a:latin typeface="Spectral"/>
+                <a:latin typeface="Cambria"/>
               </a:rPr>
               <a:t>Silence</a:t>
             </a:r>
@@ -6785,7 +6785,7 @@
                 <a:solidFill>
                   <a:srgbClr val="1F2924"/>
                 </a:solidFill>
-                <a:latin typeface="Spectral"/>
+                <a:latin typeface="Cambria"/>
               </a:rPr>
               <a:t>vol · iii</a:t>
             </a:r>
@@ -6820,7 +6820,7 @@
                 <a:solidFill>
                   <a:srgbClr val="2D3833"/>
                 </a:solidFill>
-                <a:latin typeface="Spectral"/>
+                <a:latin typeface="Cambria"/>
               </a:rPr>
               <a:t xml:space="preserve">Six chapters on the discipline that
           separates craft from competence — the
@@ -7227,7 +7227,7 @@
                 <a:solidFill>
                   <a:srgbClr val="B05A3C"/>
                 </a:solidFill>
-                <a:latin typeface="Spectral"/>
+                <a:latin typeface="Cambria"/>
               </a:rPr>
               <a:t>T</a:t>
             </a:r>
@@ -7262,7 +7262,7 @@
                 <a:solidFill>
                   <a:srgbClr val="2D3833"/>
                 </a:solidFill>
-                <a:latin typeface="Inter Tight"/>
+                <a:latin typeface="Calibri"/>
               </a:rPr>
               <a:t xml:space="preserve">
           o edit is the most quietly difficult act in any craft.
@@ -7275,7 +7275,7 @@
                 <a:solidFill>
                   <a:srgbClr val="7A8978"/>
                 </a:solidFill>
-                <a:latin typeface="Inter Tight"/>
+                <a:latin typeface="Calibri"/>
               </a:rPr>
               <a:t xml:space="preserve">A page that says less,
           says more.</a:t>
@@ -7285,7 +7285,7 @@
                 <a:solidFill>
                   <a:srgbClr val="2D3833"/>
                 </a:solidFill>
-                <a:latin typeface="Inter Tight"/>
+                <a:latin typeface="Calibri"/>
               </a:rPr>
               <a:t xml:space="preserve">
         </a:t>
@@ -7321,7 +7321,7 @@
                 <a:solidFill>
                   <a:srgbClr val="2D3833"/>
                 </a:solidFill>
-                <a:latin typeface="Inter Tight"/>
+                <a:latin typeface="Calibri"/>
               </a:rPr>
               <a:t xml:space="preserve">The disciplines that hold their composure under reduction
           — typography, music, architecture — are the ones
@@ -14653,7 +14653,7 @@
                 <a:solidFill>
                   <a:srgbClr val="1F2924"/>
                 </a:solidFill>
-                <a:latin typeface="Spectral"/>
+                <a:latin typeface="Cambria"/>
               </a:rPr>
               <a:t xml:space="preserve">The keyboard once required us to commit —
           a struck letter could not be unseen.</a:t>
@@ -15033,7 +15033,7 @@
                 <a:solidFill>
                   <a:srgbClr val="1F2924"/>
                 </a:solidFill>
-                <a:latin typeface="Spectral"/>
+                <a:latin typeface="Cambria"/>
               </a:rPr>
               <a:t xml:space="preserve">We removed forty per cent of the elements.
           Engagement rose by twenty-two.</a:t>
@@ -15113,7 +15113,7 @@
                 <a:solidFill>
                   <a:srgbClr val="2D3833"/>
                 </a:solidFill>
-                <a:latin typeface="Inter Tight"/>
+                <a:latin typeface="Calibri"/>
               </a:rPr>
               <a:t xml:space="preserve">The fewest legible elements that still
           carry the argument. That is the rule.
@@ -15476,7 +15476,7 @@
                 <a:solidFill>
                   <a:srgbClr val="1F2924"/>
                 </a:solidFill>
-                <a:latin typeface="Spectral"/>
+                <a:latin typeface="Cambria"/>
               </a:rPr>
               <a:t>One word, four voices.</a:t>
             </a:r>
@@ -15588,7 +15588,7 @@
                 <a:solidFill>
                   <a:srgbClr val="1F2924"/>
                 </a:solidFill>
-                <a:latin typeface="Spectral"/>
+                <a:latin typeface="Cambria"/>
               </a:rPr>
               <a:t>Restraint</a:t>
             </a:r>
@@ -15744,7 +15744,7 @@
                 <a:solidFill>
                   <a:srgbClr val="1F2924"/>
                 </a:solidFill>
-                <a:latin typeface="Spectral"/>
+                <a:latin typeface="Cambria"/>
               </a:rPr>
               <a:t>Restraint</a:t>
             </a:r>
@@ -15900,7 +15900,7 @@
                 <a:solidFill>
                   <a:srgbClr val="1F2924"/>
                 </a:solidFill>
-                <a:latin typeface="Spectral"/>
+                <a:latin typeface="Cambria"/>
               </a:rPr>
               <a:t>Restraint</a:t>
             </a:r>
@@ -16056,7 +16056,7 @@
                 <a:solidFill>
                   <a:srgbClr val="B05A3C"/>
                 </a:solidFill>
-                <a:latin typeface="Spectral"/>
+                <a:latin typeface="Cambria"/>
               </a:rPr>
               <a:t>Restraint</a:t>
             </a:r>
@@ -16135,7 +16135,7 @@
                 <a:solidFill>
                   <a:srgbClr val="2D3833"/>
                 </a:solidFill>
-                <a:latin typeface="Spectral"/>
+                <a:latin typeface="Cambria"/>
               </a:rPr>
               <a:t xml:space="preserve">Each axis carries a different register — weight is emphasis,
         italic is voice, family is genre. Three voices, used surgically.</a:t>
@@ -16482,7 +16482,7 @@
                 <a:solidFill>
                   <a:srgbClr val="1F2924"/>
                 </a:solidFill>
-                <a:latin typeface="Spectral"/>
+                <a:latin typeface="Cambria"/>
               </a:rPr>
               <a:t xml:space="preserve">
         To remove a thing</a:t>
@@ -16495,7 +16495,7 @@
                 <a:solidFill>
                   <a:srgbClr val="1F2924"/>
                 </a:solidFill>
-                <a:latin typeface="Spectral"/>
+                <a:latin typeface="Cambria"/>
               </a:rPr>
               <a:t xml:space="preserve">
         is to say what mattered.
@@ -25704,7 +25704,7 @@
                 <a:solidFill>
                   <a:srgbClr val="EFE9DC"/>
                 </a:solidFill>
-                <a:latin typeface="Spectral"/>
+                <a:latin typeface="Cambria"/>
               </a:rPr>
               <a:t xml:space="preserve">Where the eye chooses to rest is
           where the page chooses to live.</a:t>
@@ -26084,7 +26084,7 @@
                 <a:solidFill>
                   <a:srgbClr val="1F2924"/>
                 </a:solidFill>
-                <a:latin typeface="Spectral"/>
+                <a:latin typeface="Cambria"/>
               </a:rPr>
               <a:t>A working method, in six small acts.</a:t>
             </a:r>
@@ -26364,7 +26364,7 @@
                 <a:solidFill>
                   <a:srgbClr val="1F2924"/>
                 </a:solidFill>
-                <a:latin typeface="Spectral"/>
+                <a:latin typeface="Cambria"/>
               </a:rPr>
               <a:t>Begin generously</a:t>
             </a:r>
@@ -26399,7 +26399,7 @@
                 <a:solidFill>
                   <a:srgbClr val="2D3833"/>
                 </a:solidFill>
-                <a:latin typeface="Inter Tight"/>
+                <a:latin typeface="Calibri"/>
               </a:rPr>
               <a:t>Write the loud first draft. Do not edit while writing.</a:t>
             </a:r>
@@ -26654,7 +26654,7 @@
                 <a:solidFill>
                   <a:srgbClr val="1F2924"/>
                 </a:solidFill>
-                <a:latin typeface="Spectral"/>
+                <a:latin typeface="Cambria"/>
               </a:rPr>
               <a:t>Read it slowly</a:t>
             </a:r>
@@ -26689,7 +26689,7 @@
                 <a:solidFill>
                   <a:srgbClr val="2D3833"/>
                 </a:solidFill>
-                <a:latin typeface="Inter Tight"/>
+                <a:latin typeface="Calibri"/>
               </a:rPr>
               <a:t>A page reread is a page rewritten in your head.</a:t>
             </a:r>
@@ -27017,7 +27017,7 @@
                 <a:solidFill>
                   <a:srgbClr val="1F2924"/>
                 </a:solidFill>
-                <a:latin typeface="Spectral"/>
+                <a:latin typeface="Cambria"/>
               </a:rPr>
               <a:t>Cut what is true but unnecessary</a:t>
             </a:r>
@@ -27052,7 +27052,7 @@
                 <a:solidFill>
                   <a:srgbClr val="2D3833"/>
                 </a:solidFill>
-                <a:latin typeface="Inter Tight"/>
+                <a:latin typeface="Calibri"/>
               </a:rPr>
               <a:t>The hardest line to remove is the one you wrote well.</a:t>
             </a:r>
@@ -27222,7 +27222,7 @@
                 <a:solidFill>
                   <a:srgbClr val="1F2924"/>
                 </a:solidFill>
-                <a:latin typeface="Spectral"/>
+                <a:latin typeface="Cambria"/>
               </a:rPr>
               <a:t>Subtract the support</a:t>
             </a:r>
@@ -27257,7 +27257,7 @@
                 <a:solidFill>
                   <a:srgbClr val="2D3833"/>
                 </a:solidFill>
-                <a:latin typeface="Inter Tight"/>
+                <a:latin typeface="Calibri"/>
               </a:rPr>
               <a:t>Decoration is the first to go. Hierarchy survives without it.</a:t>
             </a:r>
@@ -27504,7 +27504,7 @@
                 <a:solidFill>
                   <a:srgbClr val="1F2924"/>
                 </a:solidFill>
-                <a:latin typeface="Spectral"/>
+                <a:latin typeface="Cambria"/>
               </a:rPr>
               <a:t>Re-anchor the argument</a:t>
             </a:r>
@@ -27539,7 +27539,7 @@
                 <a:solidFill>
                   <a:srgbClr val="2D3833"/>
                 </a:solidFill>
-                <a:latin typeface="Inter Tight"/>
+                <a:latin typeface="Calibri"/>
               </a:rPr>
               <a:t>What is the page about? Move that to the centre.</a:t>
             </a:r>
@@ -27735,7 +27735,7 @@
                 <a:solidFill>
                   <a:srgbClr val="1F2924"/>
                 </a:solidFill>
-                <a:latin typeface="Spectral"/>
+                <a:latin typeface="Cambria"/>
               </a:rPr>
               <a:t>Stop early</a:t>
             </a:r>
@@ -27770,7 +27770,7 @@
                 <a:solidFill>
                   <a:srgbClr val="2D3833"/>
                 </a:solidFill>
-                <a:latin typeface="Inter Tight"/>
+                <a:latin typeface="Calibri"/>
               </a:rPr>
               <a:t>The last cut should leave the page slightly underdressed.</a:t>
             </a:r>

--- a/_bench/dist/atlas-vol-iii.pptx
+++ b/_bench/dist/atlas-vol-iii.pptx
@@ -7512,6 +7512,20 @@
           <a:prstGeom prst="rect">
             <a:avLst/>
           </a:prstGeom>
+          <a:gradFill flip="none" rotWithShape="1">
+            <a:gsLst>
+              <a:gs pos="0">
+                <a:srgbClr val="0F1311"/>
+              </a:gs>
+              <a:gs pos="55000">
+                <a:srgbClr val="1F2924"/>
+              </a:gs>
+              <a:gs pos="100000">
+                <a:srgbClr val="8A4530"/>
+              </a:gs>
+            </a:gsLst>
+            <a:lin ang="2700000" scaled="1"/>
+          </a:gradFill>
           <a:ln>
             <a:noFill/>
           </a:ln>
@@ -7553,6 +7567,23 @@
           <a:prstGeom prst="rect">
             <a:avLst/>
           </a:prstGeom>
+          <a:gradFill flip="none" rotWithShape="1">
+            <a:gsLst>
+              <a:gs pos="0">
+                <a:srgbClr val="B05A3C">
+                  <a:alpha val="55000"/>
+                </a:srgbClr>
+              </a:gs>
+              <a:gs pos="60000">
+                <a:srgbClr val="B05A3C">
+                  <a:alpha val="0"/>
+                </a:srgbClr>
+              </a:gs>
+            </a:gsLst>
+            <a:path path="circle">
+              <a:fillToRect l="85000" t="95000" r="15000" b="5000"/>
+            </a:path>
+          </a:gradFill>
           <a:ln>
             <a:noFill/>
           </a:ln>
@@ -7594,6 +7625,23 @@
           <a:prstGeom prst="rect">
             <a:avLst/>
           </a:prstGeom>
+          <a:gradFill flip="none" rotWithShape="1">
+            <a:gsLst>
+              <a:gs pos="0">
+                <a:srgbClr val="C7C0AE">
+                  <a:alpha val="30000"/>
+                </a:srgbClr>
+              </a:gs>
+              <a:gs pos="60000">
+                <a:srgbClr val="C7C0AE">
+                  <a:alpha val="0"/>
+                </a:srgbClr>
+              </a:gs>
+            </a:gsLst>
+            <a:path path="circle">
+              <a:fillToRect l="10000" t="5000" r="90000" b="95000"/>
+            </a:path>
+          </a:gradFill>
           <a:ln>
             <a:noFill/>
           </a:ln>
@@ -8911,6 +8959,17 @@
           <a:prstGeom prst="rect">
             <a:avLst/>
           </a:prstGeom>
+          <a:gradFill flip="none" rotWithShape="1">
+            <a:gsLst>
+              <a:gs pos="0">
+                <a:srgbClr val="EFE9DC"/>
+              </a:gs>
+              <a:gs pos="100000">
+                <a:srgbClr val="C7C0AE"/>
+              </a:gs>
+            </a:gsLst>
+            <a:lin ang="5400000" scaled="1"/>
+          </a:gradFill>
           <a:ln>
             <a:noFill/>
           </a:ln>
@@ -9158,6 +9217,17 @@
               </a:path>
             </a:pathLst>
           </a:custGeom>
+          <a:gradFill flip="none" rotWithShape="1">
+            <a:gsLst>
+              <a:gs pos="0">
+                <a:srgbClr val="B05A3C"/>
+              </a:gs>
+              <a:gs pos="100000">
+                <a:srgbClr val="8A4530"/>
+              </a:gs>
+            </a:gsLst>
+            <a:lin ang="2700000" scaled="1"/>
+          </a:gradFill>
           <a:ln>
             <a:noFill/>
           </a:ln>
@@ -16720,6 +16790,20 @@
           <a:prstGeom prst="rect">
             <a:avLst/>
           </a:prstGeom>
+          <a:gradFill flip="none" rotWithShape="1">
+            <a:gsLst>
+              <a:gs pos="0">
+                <a:srgbClr val="2D3833"/>
+              </a:gs>
+              <a:gs pos="55000">
+                <a:srgbClr val="0F1311"/>
+              </a:gs>
+              <a:gs pos="100000">
+                <a:srgbClr val="8A4530"/>
+              </a:gs>
+            </a:gsLst>
+            <a:lin ang="2700000" scaled="1"/>
+          </a:gradFill>
           <a:ln>
             <a:noFill/>
           </a:ln>
@@ -16761,6 +16845,23 @@
           <a:prstGeom prst="rect">
             <a:avLst/>
           </a:prstGeom>
+          <a:gradFill flip="none" rotWithShape="1">
+            <a:gsLst>
+              <a:gs pos="0">
+                <a:srgbClr val="C7C0AE">
+                  <a:alpha val="30000"/>
+                </a:srgbClr>
+              </a:gs>
+              <a:gs pos="60000">
+                <a:srgbClr val="C7C0AE">
+                  <a:alpha val="0"/>
+                </a:srgbClr>
+              </a:gs>
+            </a:gsLst>
+            <a:path path="circle">
+              <a:fillToRect l="32000" t="40000" r="68000" b="60000"/>
+            </a:path>
+          </a:gradFill>
           <a:ln>
             <a:noFill/>
           </a:ln>
@@ -16846,6 +16947,17 @@
           <a:prstGeom prst="rect">
             <a:avLst/>
           </a:prstGeom>
+          <a:gradFill flip="none" rotWithShape="1">
+            <a:gsLst>
+              <a:gs pos="0">
+                <a:srgbClr val="EFE9DC"/>
+              </a:gs>
+              <a:gs pos="100000">
+                <a:srgbClr val="C7C0AE"/>
+              </a:gs>
+            </a:gsLst>
+            <a:lin ang="5400000" scaled="1"/>
+          </a:gradFill>
           <a:ln>
             <a:noFill/>
           </a:ln>
@@ -17441,6 +17553,20 @@
               </a:path>
             </a:pathLst>
           </a:custGeom>
+          <a:gradFill flip="none" rotWithShape="1">
+            <a:gsLst>
+              <a:gs pos="0">
+                <a:srgbClr val="EFE9DC"/>
+              </a:gs>
+              <a:gs pos="55000">
+                <a:srgbClr val="C7C0AE"/>
+              </a:gs>
+              <a:gs pos="100000">
+                <a:srgbClr val="7A8978"/>
+              </a:gs>
+            </a:gsLst>
+            <a:lin ang="5400000" scaled="1"/>
+          </a:gradFill>
           <a:ln>
             <a:noFill/>
           </a:ln>
@@ -17482,6 +17608,17 @@
           <a:prstGeom prst="ellipse">
             <a:avLst/>
           </a:prstGeom>
+          <a:gradFill flip="none" rotWithShape="1">
+            <a:gsLst>
+              <a:gs pos="0">
+                <a:srgbClr val="0F1311"/>
+              </a:gs>
+              <a:gs pos="100000">
+                <a:srgbClr val="1F2924"/>
+              </a:gs>
+            </a:gsLst>
+            <a:lin ang="5400000" scaled="1"/>
+          </a:gradFill>
           <a:ln>
             <a:noFill/>
           </a:ln>
